--- a/materials/lectures/13-dfs/slides.pptx
+++ b/materials/lectures/13-dfs/slides.pptx
@@ -7,7 +7,7 @@
     <p:sldMasterId id="2147483668" r:id="rId3"/>
   </p:sldMasterIdLst>
   <p:notesMasterIdLst>
-    <p:notesMasterId r:id="rId36"/>
+    <p:notesMasterId r:id="rId37"/>
   </p:notesMasterIdLst>
   <p:sldIdLst>
     <p:sldId id="256" r:id="rId4"/>
@@ -31,58 +31,47 @@
     <p:sldId id="824" r:id="rId22"/>
     <p:sldId id="825" r:id="rId23"/>
     <p:sldId id="833" r:id="rId24"/>
-    <p:sldId id="826" r:id="rId25"/>
-    <p:sldId id="827" r:id="rId26"/>
-    <p:sldId id="828" r:id="rId27"/>
-    <p:sldId id="829" r:id="rId28"/>
-    <p:sldId id="830" r:id="rId29"/>
-    <p:sldId id="831" r:id="rId30"/>
-    <p:sldId id="832" r:id="rId31"/>
-    <p:sldId id="837" r:id="rId32"/>
-    <p:sldId id="835" r:id="rId33"/>
-    <p:sldId id="834" r:id="rId34"/>
-    <p:sldId id="811" r:id="rId35"/>
+    <p:sldId id="840" r:id="rId25"/>
+    <p:sldId id="826" r:id="rId26"/>
+    <p:sldId id="827" r:id="rId27"/>
+    <p:sldId id="828" r:id="rId28"/>
+    <p:sldId id="829" r:id="rId29"/>
+    <p:sldId id="830" r:id="rId30"/>
+    <p:sldId id="831" r:id="rId31"/>
+    <p:sldId id="832" r:id="rId32"/>
+    <p:sldId id="837" r:id="rId33"/>
+    <p:sldId id="835" r:id="rId34"/>
+    <p:sldId id="834" r:id="rId35"/>
+    <p:sldId id="811" r:id="rId36"/>
   </p:sldIdLst>
   <p:sldSz cx="12192000" cy="6858000"/>
   <p:notesSz cx="6858000" cy="9144000"/>
   <p:embeddedFontLst>
     <p:embeddedFont>
       <p:font typeface="Bookman Old Style" panose="02050604050505020204" pitchFamily="18" charset="0"/>
-      <p:regular r:id="rId37"/>
-      <p:bold r:id="rId38"/>
-      <p:italic r:id="rId39"/>
-      <p:boldItalic r:id="rId40"/>
-    </p:embeddedFont>
-    <p:embeddedFont>
-      <p:font typeface="Calibri" panose="020F0502020204030204" pitchFamily="34" charset="0"/>
-      <p:regular r:id="rId41"/>
-      <p:bold r:id="rId42"/>
-      <p:italic r:id="rId43"/>
-      <p:boldItalic r:id="rId44"/>
-    </p:embeddedFont>
-    <p:embeddedFont>
-      <p:font typeface="Calibri Light" panose="020F0302020204030204" pitchFamily="34" charset="0"/>
-      <p:regular r:id="rId45"/>
-      <p:italic r:id="rId46"/>
+      <p:regular r:id="rId38"/>
+      <p:bold r:id="rId39"/>
+      <p:italic r:id="rId40"/>
+      <p:boldItalic r:id="rId41"/>
     </p:embeddedFont>
     <p:embeddedFont>
       <p:font typeface="Cambria Math" panose="02040503050406030204" pitchFamily="18" charset="0"/>
-      <p:regular r:id="rId47"/>
+      <p:regular r:id="rId42"/>
     </p:embeddedFont>
     <p:embeddedFont>
       <p:font typeface="Gill Sans MT" panose="020B0502020104020203" pitchFamily="34" charset="0"/>
-      <p:regular r:id="rId48"/>
-      <p:bold r:id="rId49"/>
-      <p:italic r:id="rId50"/>
-      <p:boldItalic r:id="rId51"/>
+      <p:regular r:id="rId43"/>
+      <p:bold r:id="rId44"/>
+      <p:italic r:id="rId45"/>
+      <p:boldItalic r:id="rId46"/>
     </p:embeddedFont>
     <p:embeddedFont>
       <p:font typeface="Wingdings 3" panose="05040102010807070707" pitchFamily="18" charset="2"/>
-      <p:regular r:id="rId52"/>
+      <p:regular r:id="rId47"/>
     </p:embeddedFont>
   </p:embeddedFontLst>
   <p:custDataLst>
-    <p:tags r:id="rId53"/>
+    <p:tags r:id="rId48"/>
   </p:custDataLst>
   <p:defaultTextStyle>
     <a:defPPr>
@@ -335,7 +324,7 @@
               <a:pPr>
                 <a:defRPr/>
               </a:pPr>
-              <a:t>5/25/2023</a:t>
+              <a:t>2/14/2025</a:t>
             </a:fld>
             <a:endParaRPr lang="en-US"/>
           </a:p>
@@ -1023,7 +1012,7 @@
               <a:pPr>
                 <a:defRPr/>
               </a:pPr>
-              <a:t>5/25/2023</a:t>
+              <a:t>2/14/2025</a:t>
             </a:fld>
             <a:endParaRPr lang="en-US"/>
           </a:p>
@@ -1267,7 +1256,7 @@
           <a:p>
             <a:fld id="{344494C4-6097-4BA9-B81C-8FE8D10E85BA}" type="datetimeFigureOut">
               <a:rPr lang="en-US" smtClean="0"/>
-              <a:t>5/25/2023</a:t>
+              <a:t>2/14/2025</a:t>
             </a:fld>
             <a:endParaRPr lang="en-US"/>
           </a:p>
@@ -1512,7 +1501,7 @@
           <a:p>
             <a:fld id="{344494C4-6097-4BA9-B81C-8FE8D10E85BA}" type="datetimeFigureOut">
               <a:rPr lang="en-US" smtClean="0"/>
-              <a:t>5/25/2023</a:t>
+              <a:t>2/14/2025</a:t>
             </a:fld>
             <a:endParaRPr lang="en-US"/>
           </a:p>
@@ -1892,7 +1881,7 @@
           <a:p>
             <a:fld id="{344494C4-6097-4BA9-B81C-8FE8D10E85BA}" type="datetimeFigureOut">
               <a:rPr lang="en-US" smtClean="0"/>
-              <a:t>5/25/2023</a:t>
+              <a:t>2/14/2025</a:t>
             </a:fld>
             <a:endParaRPr lang="en-US"/>
           </a:p>
@@ -2025,7 +2014,7 @@
           <a:p>
             <a:fld id="{344494C4-6097-4BA9-B81C-8FE8D10E85BA}" type="datetimeFigureOut">
               <a:rPr lang="en-US" smtClean="0"/>
-              <a:t>5/25/2023</a:t>
+              <a:t>2/14/2025</a:t>
             </a:fld>
             <a:endParaRPr lang="en-US"/>
           </a:p>
@@ -2136,7 +2125,7 @@
           <a:p>
             <a:fld id="{344494C4-6097-4BA9-B81C-8FE8D10E85BA}" type="datetimeFigureOut">
               <a:rPr lang="en-US" smtClean="0"/>
-              <a:t>5/25/2023</a:t>
+              <a:t>2/14/2025</a:t>
             </a:fld>
             <a:endParaRPr lang="en-US"/>
           </a:p>
@@ -2427,7 +2416,7 @@
           <a:p>
             <a:fld id="{344494C4-6097-4BA9-B81C-8FE8D10E85BA}" type="datetimeFigureOut">
               <a:rPr lang="en-US" smtClean="0"/>
-              <a:t>5/25/2023</a:t>
+              <a:t>2/14/2025</a:t>
             </a:fld>
             <a:endParaRPr lang="en-US"/>
           </a:p>
@@ -2695,7 +2684,7 @@
           <a:p>
             <a:fld id="{344494C4-6097-4BA9-B81C-8FE8D10E85BA}" type="datetimeFigureOut">
               <a:rPr lang="en-US" smtClean="0"/>
-              <a:t>5/25/2023</a:t>
+              <a:t>2/14/2025</a:t>
             </a:fld>
             <a:endParaRPr lang="en-US"/>
           </a:p>
@@ -2879,7 +2868,7 @@
           <a:p>
             <a:fld id="{344494C4-6097-4BA9-B81C-8FE8D10E85BA}" type="datetimeFigureOut">
               <a:rPr lang="en-US" smtClean="0"/>
-              <a:t>5/25/2023</a:t>
+              <a:t>2/14/2025</a:t>
             </a:fld>
             <a:endParaRPr lang="en-US"/>
           </a:p>
@@ -3073,7 +3062,7 @@
           <a:p>
             <a:fld id="{344494C4-6097-4BA9-B81C-8FE8D10E85BA}" type="datetimeFigureOut">
               <a:rPr lang="en-US" smtClean="0"/>
-              <a:t>5/25/2023</a:t>
+              <a:t>2/14/2025</a:t>
             </a:fld>
             <a:endParaRPr lang="en-US"/>
           </a:p>
@@ -3271,7 +3260,7 @@
           <a:p>
             <a:fld id="{7BF7D500-1223-4445-9EB2-2C72C770F9EB}" type="datetimeFigureOut">
               <a:rPr lang="en-US" smtClean="0"/>
-              <a:t>5/25/2023</a:t>
+              <a:t>2/14/2025</a:t>
             </a:fld>
             <a:endParaRPr lang="en-US"/>
           </a:p>
@@ -3454,7 +3443,7 @@
               <a:pPr>
                 <a:defRPr/>
               </a:pPr>
-              <a:t>5/25/2023</a:t>
+              <a:t>2/14/2025</a:t>
             </a:fld>
             <a:endParaRPr lang="en-US"/>
           </a:p>
@@ -3608,7 +3597,7 @@
           <a:p>
             <a:fld id="{7BF7D500-1223-4445-9EB2-2C72C770F9EB}" type="datetimeFigureOut">
               <a:rPr lang="en-US" smtClean="0"/>
-              <a:t>5/25/2023</a:t>
+              <a:t>2/14/2025</a:t>
             </a:fld>
             <a:endParaRPr lang="en-US"/>
           </a:p>
@@ -3853,7 +3842,7 @@
           <a:p>
             <a:fld id="{7BF7D500-1223-4445-9EB2-2C72C770F9EB}" type="datetimeFigureOut">
               <a:rPr lang="en-US" smtClean="0"/>
-              <a:t>5/25/2023</a:t>
+              <a:t>2/14/2025</a:t>
             </a:fld>
             <a:endParaRPr lang="en-US"/>
           </a:p>
@@ -4082,7 +4071,7 @@
           <a:p>
             <a:fld id="{7BF7D500-1223-4445-9EB2-2C72C770F9EB}" type="datetimeFigureOut">
               <a:rPr lang="en-US" smtClean="0"/>
-              <a:t>5/25/2023</a:t>
+              <a:t>2/14/2025</a:t>
             </a:fld>
             <a:endParaRPr lang="en-US"/>
           </a:p>
@@ -4446,7 +4435,7 @@
           <a:p>
             <a:fld id="{7BF7D500-1223-4445-9EB2-2C72C770F9EB}" type="datetimeFigureOut">
               <a:rPr lang="en-US" smtClean="0"/>
-              <a:t>5/25/2023</a:t>
+              <a:t>2/14/2025</a:t>
             </a:fld>
             <a:endParaRPr lang="en-US"/>
           </a:p>
@@ -4563,7 +4552,7 @@
           <a:p>
             <a:fld id="{7BF7D500-1223-4445-9EB2-2C72C770F9EB}" type="datetimeFigureOut">
               <a:rPr lang="en-US" smtClean="0"/>
-              <a:t>5/25/2023</a:t>
+              <a:t>2/14/2025</a:t>
             </a:fld>
             <a:endParaRPr lang="en-US"/>
           </a:p>
@@ -4658,7 +4647,7 @@
           <a:p>
             <a:fld id="{7BF7D500-1223-4445-9EB2-2C72C770F9EB}" type="datetimeFigureOut">
               <a:rPr lang="en-US" smtClean="0"/>
-              <a:t>5/25/2023</a:t>
+              <a:t>2/14/2025</a:t>
             </a:fld>
             <a:endParaRPr lang="en-US"/>
           </a:p>
@@ -4933,7 +4922,7 @@
           <a:p>
             <a:fld id="{7BF7D500-1223-4445-9EB2-2C72C770F9EB}" type="datetimeFigureOut">
               <a:rPr lang="en-US" smtClean="0"/>
-              <a:t>5/25/2023</a:t>
+              <a:t>2/14/2025</a:t>
             </a:fld>
             <a:endParaRPr lang="en-US"/>
           </a:p>
@@ -5185,7 +5174,7 @@
           <a:p>
             <a:fld id="{7BF7D500-1223-4445-9EB2-2C72C770F9EB}" type="datetimeFigureOut">
               <a:rPr lang="en-US" smtClean="0"/>
-              <a:t>5/25/2023</a:t>
+              <a:t>2/14/2025</a:t>
             </a:fld>
             <a:endParaRPr lang="en-US"/>
           </a:p>
@@ -5353,7 +5342,7 @@
           <a:p>
             <a:fld id="{7BF7D500-1223-4445-9EB2-2C72C770F9EB}" type="datetimeFigureOut">
               <a:rPr lang="en-US" smtClean="0"/>
-              <a:t>5/25/2023</a:t>
+              <a:t>2/14/2025</a:t>
             </a:fld>
             <a:endParaRPr lang="en-US"/>
           </a:p>
@@ -5531,7 +5520,7 @@
           <a:p>
             <a:fld id="{7BF7D500-1223-4445-9EB2-2C72C770F9EB}" type="datetimeFigureOut">
               <a:rPr lang="en-US" smtClean="0"/>
-              <a:t>5/25/2023</a:t>
+              <a:t>2/14/2025</a:t>
             </a:fld>
             <a:endParaRPr lang="en-US"/>
           </a:p>
@@ -5775,7 +5764,7 @@
               <a:pPr>
                 <a:defRPr/>
               </a:pPr>
-              <a:t>5/25/2023</a:t>
+              <a:t>2/14/2025</a:t>
             </a:fld>
             <a:endParaRPr lang="en-US"/>
           </a:p>
@@ -6125,7 +6114,7 @@
               <a:pPr>
                 <a:defRPr/>
               </a:pPr>
-              <a:t>5/25/2023</a:t>
+              <a:t>2/14/2025</a:t>
             </a:fld>
             <a:endParaRPr lang="en-US"/>
           </a:p>
@@ -6289,7 +6278,7 @@
               <a:pPr>
                 <a:defRPr/>
               </a:pPr>
-              <a:t>5/25/2023</a:t>
+              <a:t>2/14/2025</a:t>
             </a:fld>
             <a:endParaRPr lang="en-US"/>
           </a:p>
@@ -6380,7 +6369,7 @@
               <a:pPr>
                 <a:defRPr/>
               </a:pPr>
-              <a:t>5/25/2023</a:t>
+              <a:t>2/14/2025</a:t>
             </a:fld>
             <a:endParaRPr lang="en-US"/>
           </a:p>
@@ -6489,7 +6478,7 @@
               <a:pPr>
                 <a:defRPr/>
               </a:pPr>
-              <a:t>5/25/2023</a:t>
+              <a:t>2/14/2025</a:t>
             </a:fld>
             <a:endParaRPr lang="en-US"/>
           </a:p>
@@ -6674,7 +6663,7 @@
           <a:p>
             <a:fld id="{344494C4-6097-4BA9-B81C-8FE8D10E85BA}" type="datetimeFigureOut">
               <a:rPr lang="en-US" smtClean="0"/>
-              <a:t>5/25/2023</a:t>
+              <a:t>2/14/2025</a:t>
             </a:fld>
             <a:endParaRPr lang="en-US"/>
           </a:p>
@@ -6858,7 +6847,7 @@
           <a:p>
             <a:fld id="{344494C4-6097-4BA9-B81C-8FE8D10E85BA}" type="datetimeFigureOut">
               <a:rPr lang="en-US" smtClean="0"/>
-              <a:t>5/25/2023</a:t>
+              <a:t>2/14/2025</a:t>
             </a:fld>
             <a:endParaRPr lang="en-US"/>
           </a:p>
@@ -7107,7 +7096,7 @@
               <a:pPr>
                 <a:defRPr/>
               </a:pPr>
-              <a:t>5/25/2023</a:t>
+              <a:t>2/14/2025</a:t>
             </a:fld>
             <a:endParaRPr lang="en-US"/>
           </a:p>
@@ -8361,7 +8350,7 @@
           <a:p>
             <a:fld id="{7BF7D500-1223-4445-9EB2-2C72C770F9EB}" type="datetimeFigureOut">
               <a:rPr lang="en-US" smtClean="0"/>
-              <a:t>5/25/2023</a:t>
+              <a:t>2/14/2025</a:t>
             </a:fld>
             <a:endParaRPr lang="en-US"/>
           </a:p>
@@ -13359,307 +13348,8 @@
           </a:p>
         </p:txBody>
       </p:sp>
-      <mc:AlternateContent xmlns:mc="http://schemas.openxmlformats.org/markup-compatibility/2006">
-        <mc:Choice xmlns:a14="http://schemas.microsoft.com/office/drawing/2010/main" Requires="a14">
-          <p:sp>
-            <p:nvSpPr>
-              <p:cNvPr id="3" name="Content Placeholder 2">
-                <a:extLst>
-                  <a:ext uri="{FF2B5EF4-FFF2-40B4-BE49-F238E27FC236}">
-                    <a16:creationId xmlns:a16="http://schemas.microsoft.com/office/drawing/2014/main" id="{FB9A304C-5DC1-4CF7-BCB8-4143152C406A}"/>
-                  </a:ext>
-                </a:extLst>
-              </p:cNvPr>
-              <p:cNvSpPr>
-                <a:spLocks noGrp="1"/>
-              </p:cNvSpPr>
-              <p:nvPr>
-                <p:ph sz="quarter" idx="1"/>
-              </p:nvPr>
-            </p:nvSpPr>
-            <p:spPr>
-              <a:xfrm>
-                <a:off x="762000" y="3733801"/>
-                <a:ext cx="10744200" cy="1752599"/>
-              </a:xfrm>
-              <a:ln w="12700">
-                <a:solidFill>
-                  <a:schemeClr val="tx1"/>
-                </a:solidFill>
-              </a:ln>
-            </p:spPr>
-            <p:txBody>
-              <a:bodyPr/>
-              <a:lstStyle/>
-              <a:p>
-                <a:r>
-                  <a:rPr lang="en-US" dirty="0"/>
-                  <a:t>Claim B:  If a graph </a:t>
-                </a:r>
-                <a14:m>
-                  <m:oMath xmlns:m="http://schemas.openxmlformats.org/officeDocument/2006/math">
-                    <m:r>
-                      <a:rPr lang="en-US" b="0" i="1" smtClean="0">
-                        <a:latin typeface="Cambria Math" panose="02040503050406030204" pitchFamily="18" charset="0"/>
-                      </a:rPr>
-                      <m:t>𝐺</m:t>
-                    </m:r>
-                    <m:r>
-                      <a:rPr lang="en-US" b="0" i="1" smtClean="0">
-                        <a:latin typeface="Cambria Math" panose="02040503050406030204" pitchFamily="18" charset="0"/>
-                      </a:rPr>
-                      <m:t>=</m:t>
-                    </m:r>
-                    <m:d>
-                      <m:dPr>
-                        <m:ctrlPr>
-                          <a:rPr lang="en-US" b="0" i="1" smtClean="0">
-                            <a:latin typeface="Cambria Math" panose="02040503050406030204" pitchFamily="18" charset="0"/>
-                          </a:rPr>
-                        </m:ctrlPr>
-                      </m:dPr>
-                      <m:e>
-                        <m:r>
-                          <a:rPr lang="en-US" b="0" i="1" smtClean="0">
-                            <a:latin typeface="Cambria Math" panose="02040503050406030204" pitchFamily="18" charset="0"/>
-                          </a:rPr>
-                          <m:t>𝑉</m:t>
-                        </m:r>
-                        <m:r>
-                          <a:rPr lang="en-US" b="0" i="1" smtClean="0">
-                            <a:latin typeface="Cambria Math" panose="02040503050406030204" pitchFamily="18" charset="0"/>
-                          </a:rPr>
-                          <m:t>, </m:t>
-                        </m:r>
-                        <m:r>
-                          <a:rPr lang="en-US" b="0" i="1" smtClean="0">
-                            <a:latin typeface="Cambria Math" panose="02040503050406030204" pitchFamily="18" charset="0"/>
-                          </a:rPr>
-                          <m:t>𝐸</m:t>
-                        </m:r>
-                      </m:e>
-                    </m:d>
-                    <m:r>
-                      <a:rPr lang="en-US" b="0" i="1" smtClean="0">
-                        <a:latin typeface="Cambria Math" panose="02040503050406030204" pitchFamily="18" charset="0"/>
-                      </a:rPr>
-                      <m:t> </m:t>
-                    </m:r>
-                  </m:oMath>
-                </a14:m>
-                <a:r>
-                  <a:rPr lang="en-US" dirty="0"/>
-                  <a:t>does not have cycles, and node </a:t>
-                </a:r>
-                <a14:m>
-                  <m:oMath xmlns:m="http://schemas.openxmlformats.org/officeDocument/2006/math">
-                    <m:r>
-                      <a:rPr lang="en-US" i="1">
-                        <a:latin typeface="Cambria Math" panose="02040503050406030204" pitchFamily="18" charset="0"/>
-                      </a:rPr>
-                      <m:t>𝑣</m:t>
-                    </m:r>
-                  </m:oMath>
-                </a14:m>
-                <a:r>
-                  <a:rPr lang="en-US" dirty="0"/>
-                  <a:t> is reachable from </a:t>
-                </a:r>
-                <a14:m>
-                  <m:oMath xmlns:m="http://schemas.openxmlformats.org/officeDocument/2006/math">
-                    <m:r>
-                      <a:rPr lang="en-US" b="0" i="1" smtClean="0">
-                        <a:latin typeface="Cambria Math" panose="02040503050406030204" pitchFamily="18" charset="0"/>
-                      </a:rPr>
-                      <m:t>𝑢</m:t>
-                    </m:r>
-                    <m:r>
-                      <a:rPr lang="en-US" b="0" i="0" smtClean="0">
-                        <a:latin typeface="Cambria Math" panose="02040503050406030204" pitchFamily="18" charset="0"/>
-                      </a:rPr>
-                      <m:t>, </m:t>
-                    </m:r>
-                  </m:oMath>
-                </a14:m>
-                <a:r>
-                  <a:rPr lang="en-US" dirty="0"/>
-                  <a:t>then finish[</a:t>
-                </a:r>
-                <a14:m>
-                  <m:oMath xmlns:m="http://schemas.openxmlformats.org/officeDocument/2006/math">
-                    <m:r>
-                      <a:rPr lang="en-US" b="0" i="1" smtClean="0">
-                        <a:latin typeface="Cambria Math" panose="02040503050406030204" pitchFamily="18" charset="0"/>
-                      </a:rPr>
-                      <m:t>𝑣</m:t>
-                    </m:r>
-                  </m:oMath>
-                </a14:m>
-                <a:r>
-                  <a:rPr lang="en-US" dirty="0"/>
-                  <a:t>] </a:t>
-                </a:r>
-                <a14:m>
-                  <m:oMath xmlns:m="http://schemas.openxmlformats.org/officeDocument/2006/math">
-                    <m:r>
-                      <a:rPr lang="en-US" i="1">
-                        <a:latin typeface="Cambria Math" panose="02040503050406030204" pitchFamily="18" charset="0"/>
-                      </a:rPr>
-                      <m:t>≤</m:t>
-                    </m:r>
-                  </m:oMath>
-                </a14:m>
-                <a:r>
-                  <a:rPr lang="en-US" dirty="0"/>
-                  <a:t> finish[</a:t>
-                </a:r>
-                <a14:m>
-                  <m:oMath xmlns:m="http://schemas.openxmlformats.org/officeDocument/2006/math">
-                    <m:r>
-                      <a:rPr lang="en-US" b="0" i="1" smtClean="0">
-                        <a:latin typeface="Cambria Math" panose="02040503050406030204" pitchFamily="18" charset="0"/>
-                      </a:rPr>
-                      <m:t>𝑢</m:t>
-                    </m:r>
-                  </m:oMath>
-                </a14:m>
-                <a:r>
-                  <a:rPr lang="en-US" dirty="0"/>
-                  <a:t>] </a:t>
-                </a:r>
-              </a:p>
-              <a:p>
-                <a:pPr lvl="1"/>
-                <a:r>
-                  <a:rPr lang="en-US" dirty="0"/>
-                  <a:t>In the case that the graph </a:t>
-                </a:r>
-                <a14:m>
-                  <m:oMath xmlns:m="http://schemas.openxmlformats.org/officeDocument/2006/math">
-                    <m:r>
-                      <a:rPr lang="en-US" b="0" i="1" smtClean="0">
-                        <a:latin typeface="Cambria Math" panose="02040503050406030204" pitchFamily="18" charset="0"/>
-                      </a:rPr>
-                      <m:t>𝐺</m:t>
-                    </m:r>
-                    <m:r>
-                      <a:rPr lang="en-US" b="0" i="1" smtClean="0">
-                        <a:latin typeface="Cambria Math" panose="02040503050406030204" pitchFamily="18" charset="0"/>
-                      </a:rPr>
-                      <m:t>=</m:t>
-                    </m:r>
-                    <m:d>
-                      <m:dPr>
-                        <m:ctrlPr>
-                          <a:rPr lang="en-US" b="0" i="1" smtClean="0">
-                            <a:latin typeface="Cambria Math" panose="02040503050406030204" pitchFamily="18" charset="0"/>
-                          </a:rPr>
-                        </m:ctrlPr>
-                      </m:dPr>
-                      <m:e>
-                        <m:r>
-                          <a:rPr lang="en-US" b="0" i="1" smtClean="0">
-                            <a:latin typeface="Cambria Math" panose="02040503050406030204" pitchFamily="18" charset="0"/>
-                          </a:rPr>
-                          <m:t>𝑉</m:t>
-                        </m:r>
-                        <m:r>
-                          <a:rPr lang="en-US" b="0" i="1" smtClean="0">
-                            <a:latin typeface="Cambria Math" panose="02040503050406030204" pitchFamily="18" charset="0"/>
-                          </a:rPr>
-                          <m:t>,</m:t>
-                        </m:r>
-                        <m:r>
-                          <a:rPr lang="en-US" b="0" i="1" smtClean="0">
-                            <a:latin typeface="Cambria Math" panose="02040503050406030204" pitchFamily="18" charset="0"/>
-                          </a:rPr>
-                          <m:t>𝐸</m:t>
-                        </m:r>
-                      </m:e>
-                    </m:d>
-                  </m:oMath>
-                </a14:m>
-                <a:r>
-                  <a:rPr lang="en-US" dirty="0"/>
-                  <a:t> is a directed graph, then we mean if </a:t>
-                </a:r>
-                <a14:m>
-                  <m:oMath xmlns:m="http://schemas.openxmlformats.org/officeDocument/2006/math">
-                    <m:r>
-                      <a:rPr lang="en-US" i="1" dirty="0" smtClean="0">
-                        <a:latin typeface="Cambria Math" panose="02040503050406030204" pitchFamily="18" charset="0"/>
-                      </a:rPr>
-                      <m:t>𝐺</m:t>
-                    </m:r>
-                  </m:oMath>
-                </a14:m>
-                <a:r>
-                  <a:rPr lang="en-US" dirty="0"/>
-                  <a:t> does not have directed cycles. </a:t>
-                </a:r>
-              </a:p>
-              <a:p>
-                <a:pPr lvl="1"/>
-                <a:endParaRPr lang="en-US" dirty="0"/>
-              </a:p>
-              <a:p>
-                <a:pPr lvl="1"/>
-                <a:endParaRPr lang="en-US" dirty="0"/>
-              </a:p>
-            </p:txBody>
-          </p:sp>
-        </mc:Choice>
-        <mc:Fallback>
-          <p:sp>
-            <p:nvSpPr>
-              <p:cNvPr id="3" name="Content Placeholder 2">
-                <a:extLst>
-                  <a:ext uri="{FF2B5EF4-FFF2-40B4-BE49-F238E27FC236}">
-                    <a16:creationId xmlns:a16="http://schemas.microsoft.com/office/drawing/2014/main" id="{FB9A304C-5DC1-4CF7-BCB8-4143152C406A}"/>
-                  </a:ext>
-                </a:extLst>
-              </p:cNvPr>
-              <p:cNvSpPr>
-                <a:spLocks noGrp="1" noRot="1" noChangeAspect="1" noMove="1" noResize="1" noEditPoints="1" noAdjustHandles="1" noChangeArrowheads="1" noChangeShapeType="1" noTextEdit="1"/>
-              </p:cNvSpPr>
-              <p:nvPr>
-                <p:ph sz="quarter" idx="1"/>
-              </p:nvPr>
-            </p:nvSpPr>
-            <p:spPr>
-              <a:xfrm>
-                <a:off x="762000" y="3733801"/>
-                <a:ext cx="10744200" cy="1752599"/>
-              </a:xfrm>
-              <a:blipFill>
-                <a:blip r:embed="rId2"/>
-                <a:stretch>
-                  <a:fillRect l="-453" t="-3114" r="-1190" b="-1038"/>
-                </a:stretch>
-              </a:blipFill>
-              <a:ln w="12700">
-                <a:solidFill>
-                  <a:schemeClr val="tx1"/>
-                </a:solidFill>
-              </a:ln>
-            </p:spPr>
-            <p:txBody>
-              <a:bodyPr/>
-              <a:lstStyle/>
-              <a:p>
-                <a:r>
-                  <a:rPr lang="en-US">
-                    <a:noFill/>
-                  </a:rPr>
-                  <a:t> </a:t>
-                </a:r>
-              </a:p>
-            </p:txBody>
-          </p:sp>
-        </mc:Fallback>
-      </mc:AlternateContent>
-      <mc:AlternateContent xmlns:mc="http://schemas.openxmlformats.org/markup-compatibility/2006">
-        <mc:Choice xmlns:a14="http://schemas.microsoft.com/office/drawing/2010/main" Requires="a14">
+      <mc:AlternateContent xmlns:mc="http://schemas.openxmlformats.org/markup-compatibility/2006" xmlns:a14="http://schemas.microsoft.com/office/drawing/2010/main">
+        <mc:Choice Requires="a14">
           <p:sp>
             <p:nvSpPr>
               <p:cNvPr id="4" name="Content Placeholder 2">
@@ -14127,7 +13817,7 @@
             </p:txBody>
           </p:sp>
         </mc:Choice>
-        <mc:Fallback>
+        <mc:Fallback xmlns="">
           <p:sp>
             <p:nvSpPr>
               <p:cNvPr id="4" name="Content Placeholder 2">
@@ -14180,10 +13870,920 @@
           </p:sp>
         </mc:Fallback>
       </mc:AlternateContent>
+      <p:sp>
+        <p:nvSpPr>
+          <p:cNvPr id="6" name="Content Placeholder 5">
+            <a:extLst>
+              <a:ext uri="{FF2B5EF4-FFF2-40B4-BE49-F238E27FC236}">
+                <a16:creationId xmlns:a16="http://schemas.microsoft.com/office/drawing/2014/main" id="{E2A4E328-D153-6C95-2313-BB23623F21E3}"/>
+              </a:ext>
+            </a:extLst>
+          </p:cNvPr>
+          <p:cNvSpPr>
+            <a:spLocks noGrp="1"/>
+          </p:cNvSpPr>
+          <p:nvPr>
+            <p:ph sz="quarter" idx="1"/>
+          </p:nvPr>
+        </p:nvSpPr>
+        <p:spPr/>
+        <p:txBody>
+          <a:bodyPr/>
+          <a:lstStyle/>
+          <a:p>
+            <a:endParaRPr lang="en-US"/>
+          </a:p>
+        </p:txBody>
+      </p:sp>
     </p:spTree>
     <p:extLst>
       <p:ext uri="{BB962C8B-B14F-4D97-AF65-F5344CB8AC3E}">
         <p14:creationId xmlns:p14="http://schemas.microsoft.com/office/powerpoint/2010/main" val="1911959927"/>
+      </p:ext>
+    </p:extLst>
+  </p:cSld>
+  <p:clrMapOvr>
+    <a:masterClrMapping/>
+  </p:clrMapOvr>
+</p:sld>
+</file>
+
+<file path=ppt/slides/slide22.xml><?xml version="1.0" encoding="utf-8"?>
+<p:sld xmlns:a="http://schemas.openxmlformats.org/drawingml/2006/main" xmlns:r="http://schemas.openxmlformats.org/officeDocument/2006/relationships" xmlns:p="http://schemas.openxmlformats.org/presentationml/2006/main">
+  <p:cSld>
+    <p:spTree>
+      <p:nvGrpSpPr>
+        <p:cNvPr id="1" name="">
+          <a:extLst>
+            <a:ext uri="{FF2B5EF4-FFF2-40B4-BE49-F238E27FC236}">
+              <a16:creationId xmlns:a16="http://schemas.microsoft.com/office/drawing/2014/main" id="{7EB59652-3D41-BE6F-E32F-BFBAA16614F7}"/>
+            </a:ext>
+          </a:extLst>
+        </p:cNvPr>
+        <p:cNvGrpSpPr/>
+        <p:nvPr/>
+      </p:nvGrpSpPr>
+      <p:grpSpPr>
+        <a:xfrm>
+          <a:off x="0" y="0"/>
+          <a:ext cx="0" cy="0"/>
+          <a:chOff x="0" y="0"/>
+          <a:chExt cx="0" cy="0"/>
+        </a:xfrm>
+      </p:grpSpPr>
+      <p:sp>
+        <p:nvSpPr>
+          <p:cNvPr id="2" name="Title 1">
+            <a:extLst>
+              <a:ext uri="{FF2B5EF4-FFF2-40B4-BE49-F238E27FC236}">
+                <a16:creationId xmlns:a16="http://schemas.microsoft.com/office/drawing/2014/main" id="{64C5CABA-CA93-2116-E388-A6828EA19CCE}"/>
+              </a:ext>
+            </a:extLst>
+          </p:cNvPr>
+          <p:cNvSpPr>
+            <a:spLocks noGrp="1"/>
+          </p:cNvSpPr>
+          <p:nvPr>
+            <p:ph type="title"/>
+          </p:nvPr>
+        </p:nvSpPr>
+        <p:spPr/>
+        <p:txBody>
+          <a:bodyPr/>
+          <a:lstStyle/>
+          <a:p>
+            <a:r>
+              <a:rPr lang="en-US" dirty="0"/>
+              <a:t>Nesting Property of DFS</a:t>
+            </a:r>
+          </a:p>
+        </p:txBody>
+      </p:sp>
+      <mc:AlternateContent xmlns:mc="http://schemas.openxmlformats.org/markup-compatibility/2006">
+        <mc:Choice xmlns:a14="http://schemas.microsoft.com/office/drawing/2010/main" Requires="a14">
+          <p:sp>
+            <p:nvSpPr>
+              <p:cNvPr id="3" name="Content Placeholder 2">
+                <a:extLst>
+                  <a:ext uri="{FF2B5EF4-FFF2-40B4-BE49-F238E27FC236}">
+                    <a16:creationId xmlns:a16="http://schemas.microsoft.com/office/drawing/2014/main" id="{AC1C6651-9BBA-D279-1629-DB49E66EBA70}"/>
+                  </a:ext>
+                </a:extLst>
+              </p:cNvPr>
+              <p:cNvSpPr>
+                <a:spLocks noGrp="1"/>
+              </p:cNvSpPr>
+              <p:nvPr>
+                <p:ph sz="quarter" idx="1"/>
+              </p:nvPr>
+            </p:nvSpPr>
+            <p:spPr>
+              <a:xfrm>
+                <a:off x="762000" y="3733801"/>
+                <a:ext cx="10744200" cy="1752599"/>
+              </a:xfrm>
+              <a:ln w="12700">
+                <a:solidFill>
+                  <a:schemeClr val="tx1"/>
+                </a:solidFill>
+              </a:ln>
+            </p:spPr>
+            <p:txBody>
+              <a:bodyPr/>
+              <a:lstStyle/>
+              <a:p>
+                <a:r>
+                  <a:rPr lang="en-US" dirty="0"/>
+                  <a:t>Claim B:  If a graph </a:t>
+                </a:r>
+                <a14:m>
+                  <m:oMath xmlns:m="http://schemas.openxmlformats.org/officeDocument/2006/math">
+                    <m:r>
+                      <a:rPr lang="en-US" b="0" i="1" smtClean="0">
+                        <a:latin typeface="Cambria Math" panose="02040503050406030204" pitchFamily="18" charset="0"/>
+                      </a:rPr>
+                      <m:t>𝐺</m:t>
+                    </m:r>
+                    <m:r>
+                      <a:rPr lang="en-US" b="0" i="1" smtClean="0">
+                        <a:latin typeface="Cambria Math" panose="02040503050406030204" pitchFamily="18" charset="0"/>
+                      </a:rPr>
+                      <m:t>=</m:t>
+                    </m:r>
+                    <m:d>
+                      <m:dPr>
+                        <m:ctrlPr>
+                          <a:rPr lang="en-US" b="0" i="1" smtClean="0">
+                            <a:latin typeface="Cambria Math" panose="02040503050406030204" pitchFamily="18" charset="0"/>
+                          </a:rPr>
+                        </m:ctrlPr>
+                      </m:dPr>
+                      <m:e>
+                        <m:r>
+                          <a:rPr lang="en-US" b="0" i="1" smtClean="0">
+                            <a:latin typeface="Cambria Math" panose="02040503050406030204" pitchFamily="18" charset="0"/>
+                          </a:rPr>
+                          <m:t>𝑉</m:t>
+                        </m:r>
+                        <m:r>
+                          <a:rPr lang="en-US" b="0" i="1" smtClean="0">
+                            <a:latin typeface="Cambria Math" panose="02040503050406030204" pitchFamily="18" charset="0"/>
+                          </a:rPr>
+                          <m:t>, </m:t>
+                        </m:r>
+                        <m:r>
+                          <a:rPr lang="en-US" b="0" i="1" smtClean="0">
+                            <a:latin typeface="Cambria Math" panose="02040503050406030204" pitchFamily="18" charset="0"/>
+                          </a:rPr>
+                          <m:t>𝐸</m:t>
+                        </m:r>
+                      </m:e>
+                    </m:d>
+                    <m:r>
+                      <a:rPr lang="en-US" b="0" i="1" smtClean="0">
+                        <a:latin typeface="Cambria Math" panose="02040503050406030204" pitchFamily="18" charset="0"/>
+                      </a:rPr>
+                      <m:t> </m:t>
+                    </m:r>
+                  </m:oMath>
+                </a14:m>
+                <a:r>
+                  <a:rPr lang="en-US" dirty="0"/>
+                  <a:t>does not have cycles, and node </a:t>
+                </a:r>
+                <a14:m>
+                  <m:oMath xmlns:m="http://schemas.openxmlformats.org/officeDocument/2006/math">
+                    <m:r>
+                      <a:rPr lang="en-US" i="1">
+                        <a:latin typeface="Cambria Math" panose="02040503050406030204" pitchFamily="18" charset="0"/>
+                      </a:rPr>
+                      <m:t>𝑣</m:t>
+                    </m:r>
+                  </m:oMath>
+                </a14:m>
+                <a:r>
+                  <a:rPr lang="en-US" dirty="0"/>
+                  <a:t> is reachable from </a:t>
+                </a:r>
+                <a14:m>
+                  <m:oMath xmlns:m="http://schemas.openxmlformats.org/officeDocument/2006/math">
+                    <m:r>
+                      <a:rPr lang="en-US" b="0" i="1" smtClean="0">
+                        <a:latin typeface="Cambria Math" panose="02040503050406030204" pitchFamily="18" charset="0"/>
+                      </a:rPr>
+                      <m:t>𝑢</m:t>
+                    </m:r>
+                    <m:r>
+                      <a:rPr lang="en-US" b="0" i="0" smtClean="0">
+                        <a:latin typeface="Cambria Math" panose="02040503050406030204" pitchFamily="18" charset="0"/>
+                      </a:rPr>
+                      <m:t>, </m:t>
+                    </m:r>
+                  </m:oMath>
+                </a14:m>
+                <a:r>
+                  <a:rPr lang="en-US" dirty="0"/>
+                  <a:t>then finish[</a:t>
+                </a:r>
+                <a14:m>
+                  <m:oMath xmlns:m="http://schemas.openxmlformats.org/officeDocument/2006/math">
+                    <m:r>
+                      <a:rPr lang="en-US" b="0" i="1" smtClean="0">
+                        <a:latin typeface="Cambria Math" panose="02040503050406030204" pitchFamily="18" charset="0"/>
+                      </a:rPr>
+                      <m:t>𝑣</m:t>
+                    </m:r>
+                  </m:oMath>
+                </a14:m>
+                <a:r>
+                  <a:rPr lang="en-US" dirty="0"/>
+                  <a:t>] </a:t>
+                </a:r>
+                <a14:m>
+                  <m:oMath xmlns:m="http://schemas.openxmlformats.org/officeDocument/2006/math">
+                    <m:r>
+                      <a:rPr lang="en-US" i="1">
+                        <a:latin typeface="Cambria Math" panose="02040503050406030204" pitchFamily="18" charset="0"/>
+                      </a:rPr>
+                      <m:t>≤</m:t>
+                    </m:r>
+                  </m:oMath>
+                </a14:m>
+                <a:r>
+                  <a:rPr lang="en-US" dirty="0"/>
+                  <a:t> finish[</a:t>
+                </a:r>
+                <a14:m>
+                  <m:oMath xmlns:m="http://schemas.openxmlformats.org/officeDocument/2006/math">
+                    <m:r>
+                      <a:rPr lang="en-US" b="0" i="1" smtClean="0">
+                        <a:latin typeface="Cambria Math" panose="02040503050406030204" pitchFamily="18" charset="0"/>
+                      </a:rPr>
+                      <m:t>𝑢</m:t>
+                    </m:r>
+                  </m:oMath>
+                </a14:m>
+                <a:r>
+                  <a:rPr lang="en-US" dirty="0"/>
+                  <a:t>] </a:t>
+                </a:r>
+              </a:p>
+              <a:p>
+                <a:pPr lvl="1"/>
+                <a:r>
+                  <a:rPr lang="en-US" dirty="0"/>
+                  <a:t>In the case that the graph </a:t>
+                </a:r>
+                <a14:m>
+                  <m:oMath xmlns:m="http://schemas.openxmlformats.org/officeDocument/2006/math">
+                    <m:r>
+                      <a:rPr lang="en-US" b="0" i="1" smtClean="0">
+                        <a:latin typeface="Cambria Math" panose="02040503050406030204" pitchFamily="18" charset="0"/>
+                      </a:rPr>
+                      <m:t>𝐺</m:t>
+                    </m:r>
+                    <m:r>
+                      <a:rPr lang="en-US" b="0" i="1" smtClean="0">
+                        <a:latin typeface="Cambria Math" panose="02040503050406030204" pitchFamily="18" charset="0"/>
+                      </a:rPr>
+                      <m:t>=</m:t>
+                    </m:r>
+                    <m:d>
+                      <m:dPr>
+                        <m:ctrlPr>
+                          <a:rPr lang="en-US" b="0" i="1" smtClean="0">
+                            <a:latin typeface="Cambria Math" panose="02040503050406030204" pitchFamily="18" charset="0"/>
+                          </a:rPr>
+                        </m:ctrlPr>
+                      </m:dPr>
+                      <m:e>
+                        <m:r>
+                          <a:rPr lang="en-US" b="0" i="1" smtClean="0">
+                            <a:latin typeface="Cambria Math" panose="02040503050406030204" pitchFamily="18" charset="0"/>
+                          </a:rPr>
+                          <m:t>𝑉</m:t>
+                        </m:r>
+                        <m:r>
+                          <a:rPr lang="en-US" b="0" i="1" smtClean="0">
+                            <a:latin typeface="Cambria Math" panose="02040503050406030204" pitchFamily="18" charset="0"/>
+                          </a:rPr>
+                          <m:t>,</m:t>
+                        </m:r>
+                        <m:r>
+                          <a:rPr lang="en-US" b="0" i="1" smtClean="0">
+                            <a:latin typeface="Cambria Math" panose="02040503050406030204" pitchFamily="18" charset="0"/>
+                          </a:rPr>
+                          <m:t>𝐸</m:t>
+                        </m:r>
+                      </m:e>
+                    </m:d>
+                  </m:oMath>
+                </a14:m>
+                <a:r>
+                  <a:rPr lang="en-US" dirty="0"/>
+                  <a:t> is a directed graph, then we mean if </a:t>
+                </a:r>
+                <a14:m>
+                  <m:oMath xmlns:m="http://schemas.openxmlformats.org/officeDocument/2006/math">
+                    <m:r>
+                      <a:rPr lang="en-US" i="1" dirty="0" smtClean="0">
+                        <a:latin typeface="Cambria Math" panose="02040503050406030204" pitchFamily="18" charset="0"/>
+                      </a:rPr>
+                      <m:t>𝐺</m:t>
+                    </m:r>
+                  </m:oMath>
+                </a14:m>
+                <a:r>
+                  <a:rPr lang="en-US" dirty="0"/>
+                  <a:t> does not have directed cycles. </a:t>
+                </a:r>
+              </a:p>
+              <a:p>
+                <a:pPr lvl="1"/>
+                <a:endParaRPr lang="en-US" dirty="0"/>
+              </a:p>
+              <a:p>
+                <a:pPr lvl="1"/>
+                <a:endParaRPr lang="en-US" dirty="0"/>
+              </a:p>
+            </p:txBody>
+          </p:sp>
+        </mc:Choice>
+        <mc:Fallback>
+          <p:sp>
+            <p:nvSpPr>
+              <p:cNvPr id="3" name="Content Placeholder 2">
+                <a:extLst>
+                  <a:ext uri="{FF2B5EF4-FFF2-40B4-BE49-F238E27FC236}">
+                    <a16:creationId xmlns:a16="http://schemas.microsoft.com/office/drawing/2014/main" id="{AC1C6651-9BBA-D279-1629-DB49E66EBA70}"/>
+                  </a:ext>
+                </a:extLst>
+              </p:cNvPr>
+              <p:cNvSpPr>
+                <a:spLocks noGrp="1" noRot="1" noChangeAspect="1" noMove="1" noResize="1" noEditPoints="1" noAdjustHandles="1" noChangeArrowheads="1" noChangeShapeType="1" noTextEdit="1"/>
+              </p:cNvSpPr>
+              <p:nvPr>
+                <p:ph sz="quarter" idx="1"/>
+              </p:nvPr>
+            </p:nvSpPr>
+            <p:spPr>
+              <a:xfrm>
+                <a:off x="762000" y="3733801"/>
+                <a:ext cx="10744200" cy="1752599"/>
+              </a:xfrm>
+              <a:blipFill>
+                <a:blip r:embed="rId2"/>
+                <a:stretch>
+                  <a:fillRect l="-453" t="-3114" r="-1190" b="-1038"/>
+                </a:stretch>
+              </a:blipFill>
+              <a:ln w="12700">
+                <a:solidFill>
+                  <a:schemeClr val="tx1"/>
+                </a:solidFill>
+              </a:ln>
+            </p:spPr>
+            <p:txBody>
+              <a:bodyPr/>
+              <a:lstStyle/>
+              <a:p>
+                <a:r>
+                  <a:rPr lang="en-US">
+                    <a:noFill/>
+                  </a:rPr>
+                  <a:t> </a:t>
+                </a:r>
+              </a:p>
+            </p:txBody>
+          </p:sp>
+        </mc:Fallback>
+      </mc:AlternateContent>
+      <mc:AlternateContent xmlns:mc="http://schemas.openxmlformats.org/markup-compatibility/2006">
+        <mc:Choice xmlns:a14="http://schemas.microsoft.com/office/drawing/2010/main" Requires="a14">
+          <p:sp>
+            <p:nvSpPr>
+              <p:cNvPr id="4" name="Content Placeholder 2">
+                <a:extLst>
+                  <a:ext uri="{FF2B5EF4-FFF2-40B4-BE49-F238E27FC236}">
+                    <a16:creationId xmlns:a16="http://schemas.microsoft.com/office/drawing/2014/main" id="{70692A6C-9F21-7FAD-7D28-AFAFB0BD3B20}"/>
+                  </a:ext>
+                </a:extLst>
+              </p:cNvPr>
+              <p:cNvSpPr txBox="1">
+                <a:spLocks/>
+              </p:cNvSpPr>
+              <p:nvPr/>
+            </p:nvSpPr>
+            <p:spPr bwMode="auto">
+              <a:xfrm>
+                <a:off x="762000" y="1447800"/>
+                <a:ext cx="9438290" cy="1676400"/>
+              </a:xfrm>
+              <a:prstGeom prst="rect">
+                <a:avLst/>
+              </a:prstGeom>
+              <a:noFill/>
+              <a:ln w="12700">
+                <a:solidFill>
+                  <a:schemeClr val="tx1"/>
+                </a:solidFill>
+                <a:miter lim="800000"/>
+                <a:headEnd/>
+                <a:tailEnd/>
+              </a:ln>
+            </p:spPr>
+            <p:txBody>
+              <a:bodyPr vert="horz" wrap="square" lIns="91440" tIns="45720" rIns="91440" bIns="45720" numCol="1" anchor="t" anchorCtr="0" compatLnSpc="1">
+                <a:prstTxWarp prst="textNoShape">
+                  <a:avLst/>
+                </a:prstTxWarp>
+              </a:bodyPr>
+              <a:lstStyle>
+                <a:lvl1pPr marL="273050" indent="-273050" algn="l" rtl="0" eaLnBrk="0" fontAlgn="base" hangingPunct="0">
+                  <a:spcBef>
+                    <a:spcPts val="600"/>
+                  </a:spcBef>
+                  <a:spcAft>
+                    <a:spcPct val="0"/>
+                  </a:spcAft>
+                  <a:buClr>
+                    <a:schemeClr val="accent1"/>
+                  </a:buClr>
+                  <a:buSzPct val="76000"/>
+                  <a:buFont typeface="Wingdings 3" pitchFamily="18" charset="2"/>
+                  <a:buChar char=""/>
+                  <a:defRPr sz="2600" kern="1200">
+                    <a:solidFill>
+                      <a:schemeClr val="tx1"/>
+                    </a:solidFill>
+                    <a:latin typeface="+mn-lt"/>
+                    <a:ea typeface="+mn-ea"/>
+                    <a:cs typeface="+mn-cs"/>
+                  </a:defRPr>
+                </a:lvl1pPr>
+                <a:lvl2pPr marL="547688" indent="-273050" algn="l" rtl="0" eaLnBrk="0" fontAlgn="base" hangingPunct="0">
+                  <a:spcBef>
+                    <a:spcPts val="500"/>
+                  </a:spcBef>
+                  <a:spcAft>
+                    <a:spcPct val="0"/>
+                  </a:spcAft>
+                  <a:buClr>
+                    <a:schemeClr val="accent2"/>
+                  </a:buClr>
+                  <a:buSzPct val="76000"/>
+                  <a:buFont typeface="Wingdings 3" pitchFamily="18" charset="2"/>
+                  <a:buChar char=""/>
+                  <a:defRPr sz="2300" kern="1200">
+                    <a:solidFill>
+                      <a:schemeClr val="tx2"/>
+                    </a:solidFill>
+                    <a:latin typeface="+mn-lt"/>
+                    <a:ea typeface="+mn-ea"/>
+                    <a:cs typeface="+mn-cs"/>
+                  </a:defRPr>
+                </a:lvl2pPr>
+                <a:lvl3pPr marL="822325" indent="-228600" algn="l" rtl="0" eaLnBrk="0" fontAlgn="base" hangingPunct="0">
+                  <a:spcBef>
+                    <a:spcPts val="500"/>
+                  </a:spcBef>
+                  <a:spcAft>
+                    <a:spcPct val="0"/>
+                  </a:spcAft>
+                  <a:buClr>
+                    <a:srgbClr val="BCBCBC"/>
+                  </a:buClr>
+                  <a:buSzPct val="76000"/>
+                  <a:buFont typeface="Wingdings 3" pitchFamily="18" charset="2"/>
+                  <a:buChar char=""/>
+                  <a:defRPr sz="2000" kern="1200">
+                    <a:solidFill>
+                      <a:schemeClr val="tx1"/>
+                    </a:solidFill>
+                    <a:latin typeface="+mn-lt"/>
+                    <a:ea typeface="+mn-ea"/>
+                    <a:cs typeface="+mn-cs"/>
+                  </a:defRPr>
+                </a:lvl3pPr>
+                <a:lvl4pPr marL="1096963" indent="-228600" algn="l" rtl="0" eaLnBrk="0" fontAlgn="base" hangingPunct="0">
+                  <a:spcBef>
+                    <a:spcPts val="400"/>
+                  </a:spcBef>
+                  <a:spcAft>
+                    <a:spcPct val="0"/>
+                  </a:spcAft>
+                  <a:buClr>
+                    <a:srgbClr val="8BA2B4"/>
+                  </a:buClr>
+                  <a:buSzPct val="70000"/>
+                  <a:buFont typeface="Wingdings" pitchFamily="2" charset="2"/>
+                  <a:buChar char=""/>
+                  <a:defRPr sz="2000" kern="1200">
+                    <a:solidFill>
+                      <a:schemeClr val="tx1"/>
+                    </a:solidFill>
+                    <a:latin typeface="+mn-lt"/>
+                    <a:ea typeface="+mn-ea"/>
+                    <a:cs typeface="+mn-cs"/>
+                  </a:defRPr>
+                </a:lvl4pPr>
+                <a:lvl5pPr marL="1371600" indent="-228600" algn="l" rtl="0" eaLnBrk="0" fontAlgn="base" hangingPunct="0">
+                  <a:spcBef>
+                    <a:spcPts val="300"/>
+                  </a:spcBef>
+                  <a:spcAft>
+                    <a:spcPct val="0"/>
+                  </a:spcAft>
+                  <a:buClr>
+                    <a:schemeClr val="accent2"/>
+                  </a:buClr>
+                  <a:buSzPct val="70000"/>
+                  <a:buFont typeface="Wingdings" pitchFamily="2" charset="2"/>
+                  <a:buChar char=""/>
+                  <a:defRPr sz="1600" kern="1200">
+                    <a:solidFill>
+                      <a:schemeClr val="tx1"/>
+                    </a:solidFill>
+                    <a:latin typeface="+mn-lt"/>
+                    <a:ea typeface="+mn-ea"/>
+                    <a:cs typeface="+mn-cs"/>
+                  </a:defRPr>
+                </a:lvl5pPr>
+                <a:lvl6pPr marL="1645920" indent="-182880" algn="l" rtl="0" eaLnBrk="1" latinLnBrk="0" hangingPunct="1">
+                  <a:spcBef>
+                    <a:spcPts val="300"/>
+                  </a:spcBef>
+                  <a:buClr>
+                    <a:srgbClr val="9FB8CD">
+                      <a:shade val="75000"/>
+                    </a:srgbClr>
+                  </a:buClr>
+                  <a:buSzPct val="75000"/>
+                  <a:buFont typeface="Wingdings 3"/>
+                  <a:buChar char=""/>
+                  <a:defRPr kumimoji="0" lang="en-US" sz="1600" kern="1200" smtClean="0">
+                    <a:solidFill>
+                      <a:schemeClr val="tx1"/>
+                    </a:solidFill>
+                    <a:latin typeface="+mn-lt"/>
+                    <a:ea typeface="+mn-ea"/>
+                    <a:cs typeface="+mn-cs"/>
+                  </a:defRPr>
+                </a:lvl6pPr>
+                <a:lvl7pPr marL="1828800" indent="-182880" algn="l" rtl="0" eaLnBrk="1" latinLnBrk="0" hangingPunct="1">
+                  <a:spcBef>
+                    <a:spcPts val="300"/>
+                  </a:spcBef>
+                  <a:buClr>
+                    <a:srgbClr val="727CA3">
+                      <a:shade val="75000"/>
+                    </a:srgbClr>
+                  </a:buClr>
+                  <a:buSzPct val="75000"/>
+                  <a:buFont typeface="Wingdings 3"/>
+                  <a:buChar char=""/>
+                  <a:defRPr kumimoji="0" lang="en-US" sz="1400" kern="1200" smtClean="0">
+                    <a:solidFill>
+                      <a:schemeClr val="tx1"/>
+                    </a:solidFill>
+                    <a:latin typeface="+mn-lt"/>
+                    <a:ea typeface="+mn-ea"/>
+                    <a:cs typeface="+mn-cs"/>
+                  </a:defRPr>
+                </a:lvl7pPr>
+                <a:lvl8pPr marL="2011680" indent="-182880" algn="l" rtl="0" eaLnBrk="1" latinLnBrk="0" hangingPunct="1">
+                  <a:spcBef>
+                    <a:spcPts val="300"/>
+                  </a:spcBef>
+                  <a:buClr>
+                    <a:prstClr val="white">
+                      <a:shade val="50000"/>
+                    </a:prstClr>
+                  </a:buClr>
+                  <a:buSzPct val="75000"/>
+                  <a:buFont typeface="Wingdings 3"/>
+                  <a:buChar char=""/>
+                  <a:defRPr kumimoji="0" lang="en-US" sz="1400" kern="1200" smtClean="0">
+                    <a:solidFill>
+                      <a:schemeClr val="tx1"/>
+                    </a:solidFill>
+                    <a:latin typeface="+mn-lt"/>
+                    <a:ea typeface="+mn-ea"/>
+                    <a:cs typeface="+mn-cs"/>
+                  </a:defRPr>
+                </a:lvl8pPr>
+                <a:lvl9pPr marL="2194560" indent="-182880" algn="l" rtl="0" eaLnBrk="1" latinLnBrk="0" hangingPunct="1">
+                  <a:spcBef>
+                    <a:spcPts val="300"/>
+                  </a:spcBef>
+                  <a:buClr>
+                    <a:srgbClr val="9FB8CD"/>
+                  </a:buClr>
+                  <a:buSzPct val="75000"/>
+                  <a:buFont typeface="Wingdings 3"/>
+                  <a:buChar char=""/>
+                  <a:defRPr kumimoji="0" lang="en-US" sz="1200" kern="1200" smtClean="0">
+                    <a:solidFill>
+                      <a:schemeClr val="tx1"/>
+                    </a:solidFill>
+                    <a:latin typeface="+mn-lt"/>
+                    <a:ea typeface="+mn-ea"/>
+                    <a:cs typeface="+mn-cs"/>
+                  </a:defRPr>
+                </a:lvl9pPr>
+              </a:lstStyle>
+              <a:p>
+                <a:r>
+                  <a:rPr lang="en-US" dirty="0"/>
+                  <a:t>Take any two nodes </a:t>
+                </a:r>
+                <a14:m>
+                  <m:oMath xmlns:m="http://schemas.openxmlformats.org/officeDocument/2006/math">
+                    <m:r>
+                      <a:rPr lang="en-US" i="1">
+                        <a:latin typeface="Cambria Math" panose="02040503050406030204" pitchFamily="18" charset="0"/>
+                      </a:rPr>
+                      <m:t>𝑢</m:t>
+                    </m:r>
+                  </m:oMath>
+                </a14:m>
+                <a:r>
+                  <a:rPr lang="en-US" dirty="0"/>
+                  <a:t> and </a:t>
+                </a:r>
+                <a14:m>
+                  <m:oMath xmlns:m="http://schemas.openxmlformats.org/officeDocument/2006/math">
+                    <m:r>
+                      <a:rPr lang="en-US" i="1">
+                        <a:latin typeface="Cambria Math" panose="02040503050406030204" pitchFamily="18" charset="0"/>
+                      </a:rPr>
+                      <m:t>𝑣</m:t>
+                    </m:r>
+                  </m:oMath>
+                </a14:m>
+                <a:r>
+                  <a:rPr lang="en-US" dirty="0"/>
+                  <a:t> where </a:t>
+                </a:r>
+                <a14:m>
+                  <m:oMath xmlns:m="http://schemas.openxmlformats.org/officeDocument/2006/math">
+                    <m:r>
+                      <a:rPr lang="en-US" i="1">
+                        <a:latin typeface="Cambria Math" panose="02040503050406030204" pitchFamily="18" charset="0"/>
+                      </a:rPr>
+                      <m:t>𝑣</m:t>
+                    </m:r>
+                  </m:oMath>
+                </a14:m>
+                <a:r>
+                  <a:rPr lang="en-US" dirty="0"/>
+                  <a:t> is reachable from </a:t>
+                </a:r>
+                <a14:m>
+                  <m:oMath xmlns:m="http://schemas.openxmlformats.org/officeDocument/2006/math">
+                    <m:r>
+                      <a:rPr lang="en-US" i="1">
+                        <a:latin typeface="Cambria Math" panose="02040503050406030204" pitchFamily="18" charset="0"/>
+                      </a:rPr>
+                      <m:t>𝑢</m:t>
+                    </m:r>
+                  </m:oMath>
+                </a14:m>
+                <a:endParaRPr lang="en-US" dirty="0"/>
+              </a:p>
+              <a:p>
+                <a:pPr lvl="1"/>
+                <a:r>
+                  <a:rPr lang="en-US" dirty="0"/>
+                  <a:t>If while exploring </a:t>
+                </a:r>
+                <a14:m>
+                  <m:oMath xmlns:m="http://schemas.openxmlformats.org/officeDocument/2006/math">
+                    <m:r>
+                      <a:rPr lang="en-US" i="1" dirty="0" smtClean="0">
+                        <a:latin typeface="Cambria Math" panose="02040503050406030204" pitchFamily="18" charset="0"/>
+                      </a:rPr>
+                      <m:t>𝑢</m:t>
+                    </m:r>
+                  </m:oMath>
+                </a14:m>
+                <a:r>
+                  <a:rPr lang="en-US" dirty="0"/>
+                  <a:t> we reached </a:t>
+                </a:r>
+                <a14:m>
+                  <m:oMath xmlns:m="http://schemas.openxmlformats.org/officeDocument/2006/math">
+                    <m:r>
+                      <a:rPr lang="en-US" i="1" dirty="0" smtClean="0">
+                        <a:latin typeface="Cambria Math" panose="02040503050406030204" pitchFamily="18" charset="0"/>
+                      </a:rPr>
+                      <m:t>𝑣</m:t>
+                    </m:r>
+                  </m:oMath>
+                </a14:m>
+                <a:r>
+                  <a:rPr lang="en-US" dirty="0"/>
+                  <a:t>,  then the exploration of </a:t>
+                </a:r>
+                <a14:m>
+                  <m:oMath xmlns:m="http://schemas.openxmlformats.org/officeDocument/2006/math">
+                    <m:r>
+                      <a:rPr lang="en-US" b="0" i="1" smtClean="0">
+                        <a:latin typeface="Cambria Math" panose="02040503050406030204" pitchFamily="18" charset="0"/>
+                      </a:rPr>
+                      <m:t>𝑣</m:t>
+                    </m:r>
+                  </m:oMath>
+                </a14:m>
+                <a:r>
+                  <a:rPr lang="en-US" dirty="0"/>
+                  <a:t> has to be done first before we finish exploring </a:t>
+                </a:r>
+                <a14:m>
+                  <m:oMath xmlns:m="http://schemas.openxmlformats.org/officeDocument/2006/math">
+                    <m:r>
+                      <a:rPr lang="en-US" i="1" dirty="0">
+                        <a:latin typeface="Cambria Math" panose="02040503050406030204" pitchFamily="18" charset="0"/>
+                      </a:rPr>
+                      <m:t>𝑢</m:t>
+                    </m:r>
+                  </m:oMath>
+                </a14:m>
+                <a:endParaRPr lang="en-US" dirty="0"/>
+              </a:p>
+              <a:p>
+                <a:pPr lvl="2"/>
+                <a:r>
+                  <a:rPr lang="en-US" dirty="0"/>
+                  <a:t>That is:  start[</a:t>
+                </a:r>
+                <a14:m>
+                  <m:oMath xmlns:m="http://schemas.openxmlformats.org/officeDocument/2006/math">
+                    <m:r>
+                      <a:rPr lang="en-US" i="1">
+                        <a:latin typeface="Cambria Math" panose="02040503050406030204" pitchFamily="18" charset="0"/>
+                      </a:rPr>
+                      <m:t>𝑢</m:t>
+                    </m:r>
+                  </m:oMath>
+                </a14:m>
+                <a:r>
+                  <a:rPr lang="en-US" dirty="0"/>
+                  <a:t>] </a:t>
+                </a:r>
+                <a14:m>
+                  <m:oMath xmlns:m="http://schemas.openxmlformats.org/officeDocument/2006/math">
+                    <m:r>
+                      <a:rPr lang="en-US" i="1">
+                        <a:latin typeface="Cambria Math" panose="02040503050406030204" pitchFamily="18" charset="0"/>
+                      </a:rPr>
+                      <m:t>≤</m:t>
+                    </m:r>
+                  </m:oMath>
+                </a14:m>
+                <a:r>
+                  <a:rPr lang="en-US" dirty="0"/>
+                  <a:t> start[</a:t>
+                </a:r>
+                <a14:m>
+                  <m:oMath xmlns:m="http://schemas.openxmlformats.org/officeDocument/2006/math">
+                    <m:r>
+                      <a:rPr lang="en-US" i="1">
+                        <a:latin typeface="Cambria Math" panose="02040503050406030204" pitchFamily="18" charset="0"/>
+                      </a:rPr>
+                      <m:t>𝑣</m:t>
+                    </m:r>
+                  </m:oMath>
+                </a14:m>
+                <a:r>
+                  <a:rPr lang="en-US" dirty="0"/>
+                  <a:t>] </a:t>
+                </a:r>
+                <a14:m>
+                  <m:oMath xmlns:m="http://schemas.openxmlformats.org/officeDocument/2006/math">
+                    <m:r>
+                      <a:rPr lang="en-US" i="1">
+                        <a:latin typeface="Cambria Math" panose="02040503050406030204" pitchFamily="18" charset="0"/>
+                      </a:rPr>
+                      <m:t>≤</m:t>
+                    </m:r>
+                  </m:oMath>
+                </a14:m>
+                <a:r>
+                  <a:rPr lang="en-US" dirty="0"/>
+                  <a:t> finish[</a:t>
+                </a:r>
+                <a14:m>
+                  <m:oMath xmlns:m="http://schemas.openxmlformats.org/officeDocument/2006/math">
+                    <m:r>
+                      <a:rPr lang="en-US" i="1">
+                        <a:latin typeface="Cambria Math" panose="02040503050406030204" pitchFamily="18" charset="0"/>
+                      </a:rPr>
+                      <m:t>𝑣</m:t>
+                    </m:r>
+                  </m:oMath>
+                </a14:m>
+                <a:r>
+                  <a:rPr lang="en-US" dirty="0"/>
+                  <a:t>] </a:t>
+                </a:r>
+                <a14:m>
+                  <m:oMath xmlns:m="http://schemas.openxmlformats.org/officeDocument/2006/math">
+                    <m:r>
+                      <a:rPr lang="en-US" i="1">
+                        <a:latin typeface="Cambria Math" panose="02040503050406030204" pitchFamily="18" charset="0"/>
+                      </a:rPr>
+                      <m:t>≤</m:t>
+                    </m:r>
+                  </m:oMath>
+                </a14:m>
+                <a:r>
+                  <a:rPr lang="en-US" dirty="0"/>
+                  <a:t> finish[</a:t>
+                </a:r>
+                <a14:m>
+                  <m:oMath xmlns:m="http://schemas.openxmlformats.org/officeDocument/2006/math">
+                    <m:r>
+                      <a:rPr lang="en-US" i="1">
+                        <a:latin typeface="Cambria Math" panose="02040503050406030204" pitchFamily="18" charset="0"/>
+                      </a:rPr>
+                      <m:t>𝑢</m:t>
+                    </m:r>
+                  </m:oMath>
+                </a14:m>
+                <a:r>
+                  <a:rPr lang="en-US" dirty="0"/>
+                  <a:t>] </a:t>
+                </a:r>
+              </a:p>
+              <a:p>
+                <a:pPr lvl="1"/>
+                <a:endParaRPr lang="en-US" dirty="0"/>
+              </a:p>
+              <a:p>
+                <a:pPr lvl="1"/>
+                <a:endParaRPr lang="en-US" dirty="0"/>
+              </a:p>
+            </p:txBody>
+          </p:sp>
+        </mc:Choice>
+        <mc:Fallback>
+          <p:sp>
+            <p:nvSpPr>
+              <p:cNvPr id="4" name="Content Placeholder 2">
+                <a:extLst>
+                  <a:ext uri="{FF2B5EF4-FFF2-40B4-BE49-F238E27FC236}">
+                    <a16:creationId xmlns:a16="http://schemas.microsoft.com/office/drawing/2014/main" id="{70692A6C-9F21-7FAD-7D28-AFAFB0BD3B20}"/>
+                  </a:ext>
+                </a:extLst>
+              </p:cNvPr>
+              <p:cNvSpPr txBox="1">
+                <a:spLocks noRot="1" noChangeAspect="1" noMove="1" noResize="1" noEditPoints="1" noAdjustHandles="1" noChangeArrowheads="1" noChangeShapeType="1" noTextEdit="1"/>
+              </p:cNvSpPr>
+              <p:nvPr/>
+            </p:nvSpPr>
+            <p:spPr bwMode="auto">
+              <a:xfrm>
+                <a:off x="762000" y="1447800"/>
+                <a:ext cx="9438290" cy="1676400"/>
+              </a:xfrm>
+              <a:prstGeom prst="rect">
+                <a:avLst/>
+              </a:prstGeom>
+              <a:blipFill>
+                <a:blip r:embed="rId3"/>
+                <a:stretch>
+                  <a:fillRect l="-516" t="-3249" b="-2527"/>
+                </a:stretch>
+              </a:blipFill>
+              <a:ln w="12700">
+                <a:solidFill>
+                  <a:schemeClr val="tx1"/>
+                </a:solidFill>
+                <a:miter lim="800000"/>
+                <a:headEnd/>
+                <a:tailEnd/>
+              </a:ln>
+            </p:spPr>
+            <p:txBody>
+              <a:bodyPr/>
+              <a:lstStyle/>
+              <a:p>
+                <a:r>
+                  <a:rPr lang="en-US">
+                    <a:noFill/>
+                  </a:rPr>
+                  <a:t> </a:t>
+                </a:r>
+              </a:p>
+            </p:txBody>
+          </p:sp>
+        </mc:Fallback>
+      </mc:AlternateContent>
+    </p:spTree>
+    <p:extLst>
+      <p:ext uri="{BB962C8B-B14F-4D97-AF65-F5344CB8AC3E}">
+        <p14:creationId xmlns:p14="http://schemas.microsoft.com/office/powerpoint/2010/main" val="3120903224"/>
       </p:ext>
     </p:extLst>
   </p:cSld>
@@ -14306,7 +14906,7 @@
 </p:sld>
 </file>
 
-<file path=ppt/slides/slide22.xml><?xml version="1.0" encoding="utf-8"?>
+<file path=ppt/slides/slide23.xml><?xml version="1.0" encoding="utf-8"?>
 <p:sld xmlns:a="http://schemas.openxmlformats.org/drawingml/2006/main" xmlns:r="http://schemas.openxmlformats.org/officeDocument/2006/relationships" xmlns:p="http://schemas.openxmlformats.org/presentationml/2006/main">
   <p:cSld>
     <p:spTree>
@@ -14370,7 +14970,7 @@
 </p:sld>
 </file>
 
-<file path=ppt/slides/slide23.xml><?xml version="1.0" encoding="utf-8"?>
+<file path=ppt/slides/slide24.xml><?xml version="1.0" encoding="utf-8"?>
 <p:sld xmlns:a="http://schemas.openxmlformats.org/drawingml/2006/main" xmlns:r="http://schemas.openxmlformats.org/officeDocument/2006/relationships" xmlns:p="http://schemas.openxmlformats.org/presentationml/2006/main">
   <p:cSld>
     <p:spTree>
@@ -14759,7 +15359,7 @@
 </p:sld>
 </file>
 
-<file path=ppt/slides/slide24.xml><?xml version="1.0" encoding="utf-8"?>
+<file path=ppt/slides/slide25.xml><?xml version="1.0" encoding="utf-8"?>
 <p:sld xmlns:a="http://schemas.openxmlformats.org/drawingml/2006/main" xmlns:r="http://schemas.openxmlformats.org/officeDocument/2006/relationships" xmlns:p="http://schemas.openxmlformats.org/presentationml/2006/main">
   <p:cSld>
     <p:spTree>
@@ -15112,7 +15712,7 @@
 </p:sld>
 </file>
 
-<file path=ppt/slides/slide25.xml><?xml version="1.0" encoding="utf-8"?>
+<file path=ppt/slides/slide26.xml><?xml version="1.0" encoding="utf-8"?>
 <p:sld xmlns:a="http://schemas.openxmlformats.org/drawingml/2006/main" xmlns:r="http://schemas.openxmlformats.org/officeDocument/2006/relationships" xmlns:p="http://schemas.openxmlformats.org/presentationml/2006/main">
   <p:cSld>
     <p:spTree>
@@ -15691,7 +16291,7 @@
 </p:sld>
 </file>
 
-<file path=ppt/slides/slide26.xml><?xml version="1.0" encoding="utf-8"?>
+<file path=ppt/slides/slide27.xml><?xml version="1.0" encoding="utf-8"?>
 <p:sld xmlns:a="http://schemas.openxmlformats.org/drawingml/2006/main" xmlns:r="http://schemas.openxmlformats.org/officeDocument/2006/relationships" xmlns:p="http://schemas.openxmlformats.org/presentationml/2006/main">
   <p:cSld>
     <p:spTree>
@@ -16368,7 +16968,7 @@
 </p:sld>
 </file>
 
-<file path=ppt/slides/slide27.xml><?xml version="1.0" encoding="utf-8"?>
+<file path=ppt/slides/slide28.xml><?xml version="1.0" encoding="utf-8"?>
 <p:sld xmlns:a="http://schemas.openxmlformats.org/drawingml/2006/main" xmlns:r="http://schemas.openxmlformats.org/officeDocument/2006/relationships" xmlns:p="http://schemas.openxmlformats.org/presentationml/2006/main">
   <p:cSld>
     <p:spTree>
@@ -17211,7 +17811,7 @@
 </p:sld>
 </file>
 
-<file path=ppt/slides/slide28.xml><?xml version="1.0" encoding="utf-8"?>
+<file path=ppt/slides/slide29.xml><?xml version="1.0" encoding="utf-8"?>
 <p:sld xmlns:a="http://schemas.openxmlformats.org/drawingml/2006/main" xmlns:r="http://schemas.openxmlformats.org/officeDocument/2006/relationships" xmlns:p="http://schemas.openxmlformats.org/presentationml/2006/main">
   <p:cSld>
     <p:spTree>
@@ -18689,199 +19289,6 @@
 </p:sld>
 </file>
 
-<file path=ppt/slides/slide29.xml><?xml version="1.0" encoding="utf-8"?>
-<p:sld xmlns:a="http://schemas.openxmlformats.org/drawingml/2006/main" xmlns:r="http://schemas.openxmlformats.org/officeDocument/2006/relationships" xmlns:p="http://schemas.openxmlformats.org/presentationml/2006/main">
-  <p:cSld>
-    <p:spTree>
-      <p:nvGrpSpPr>
-        <p:cNvPr id="1" name=""/>
-        <p:cNvGrpSpPr/>
-        <p:nvPr/>
-      </p:nvGrpSpPr>
-      <p:grpSpPr>
-        <a:xfrm>
-          <a:off x="0" y="0"/>
-          <a:ext cx="0" cy="0"/>
-          <a:chOff x="0" y="0"/>
-          <a:chExt cx="0" cy="0"/>
-        </a:xfrm>
-      </p:grpSpPr>
-      <p:sp>
-        <p:nvSpPr>
-          <p:cNvPr id="2" name="Title 1">
-            <a:extLst>
-              <a:ext uri="{FF2B5EF4-FFF2-40B4-BE49-F238E27FC236}">
-                <a16:creationId xmlns:a16="http://schemas.microsoft.com/office/drawing/2014/main" id="{4D6D1453-E58B-45BD-BAA4-656BAE6322B8}"/>
-              </a:ext>
-            </a:extLst>
-          </p:cNvPr>
-          <p:cNvSpPr>
-            <a:spLocks noGrp="1"/>
-          </p:cNvSpPr>
-          <p:nvPr>
-            <p:ph type="title"/>
-          </p:nvPr>
-        </p:nvSpPr>
-        <p:spPr/>
-        <p:txBody>
-          <a:bodyPr/>
-          <a:lstStyle/>
-          <a:p>
-            <a:r>
-              <a:rPr lang="en-US" dirty="0"/>
-              <a:t>Example</a:t>
-            </a:r>
-          </a:p>
-        </p:txBody>
-      </p:sp>
-      <p:sp>
-        <p:nvSpPr>
-          <p:cNvPr id="3" name="Content Placeholder 2">
-            <a:extLst>
-              <a:ext uri="{FF2B5EF4-FFF2-40B4-BE49-F238E27FC236}">
-                <a16:creationId xmlns:a16="http://schemas.microsoft.com/office/drawing/2014/main" id="{32A02CE3-4B96-4158-9FA7-2876DB5B7749}"/>
-              </a:ext>
-            </a:extLst>
-          </p:cNvPr>
-          <p:cNvSpPr>
-            <a:spLocks noGrp="1"/>
-          </p:cNvSpPr>
-          <p:nvPr>
-            <p:ph sz="quarter" idx="1"/>
-          </p:nvPr>
-        </p:nvSpPr>
-        <p:spPr>
-          <a:xfrm>
-            <a:off x="1981200" y="3048000"/>
-            <a:ext cx="8229600" cy="3108960"/>
-          </a:xfrm>
-        </p:spPr>
-        <p:txBody>
-          <a:bodyPr/>
-          <a:lstStyle/>
-          <a:p>
-            <a:endParaRPr lang="en-US" dirty="0"/>
-          </a:p>
-        </p:txBody>
-      </p:sp>
-      <p:pic>
-        <p:nvPicPr>
-          <p:cNvPr id="4" name="Picture 3">
-            <a:extLst>
-              <a:ext uri="{FF2B5EF4-FFF2-40B4-BE49-F238E27FC236}">
-                <a16:creationId xmlns:a16="http://schemas.microsoft.com/office/drawing/2014/main" id="{57E3D3F3-6A1C-4DBF-BFE6-254AC491E3B7}"/>
-              </a:ext>
-            </a:extLst>
-          </p:cNvPr>
-          <p:cNvPicPr>
-            <a:picLocks noChangeAspect="1"/>
-          </p:cNvPicPr>
-          <p:nvPr/>
-        </p:nvPicPr>
-        <p:blipFill>
-          <a:blip r:embed="rId2"/>
-          <a:stretch>
-            <a:fillRect/>
-          </a:stretch>
-        </p:blipFill>
-        <p:spPr>
-          <a:xfrm>
-            <a:off x="3048001" y="1371600"/>
-            <a:ext cx="5569607" cy="1316244"/>
-          </a:xfrm>
-          <a:prstGeom prst="rect">
-            <a:avLst/>
-          </a:prstGeom>
-        </p:spPr>
-      </p:pic>
-    </p:spTree>
-    <p:extLst>
-      <p:ext uri="{BB962C8B-B14F-4D97-AF65-F5344CB8AC3E}">
-        <p14:creationId xmlns:p14="http://schemas.microsoft.com/office/powerpoint/2010/main" val="2247355705"/>
-      </p:ext>
-    </p:extLst>
-  </p:cSld>
-  <p:clrMapOvr>
-    <a:masterClrMapping/>
-  </p:clrMapOvr>
-  <p:timing>
-    <p:tnLst>
-      <p:par>
-        <p:cTn id="1" dur="indefinite" restart="never" nodeType="tmRoot">
-          <p:childTnLst>
-            <p:seq concurrent="1" nextAc="seek">
-              <p:cTn id="2" dur="indefinite" nodeType="mainSeq">
-                <p:childTnLst>
-                  <p:par>
-                    <p:cTn id="3" fill="hold">
-                      <p:stCondLst>
-                        <p:cond delay="indefinite"/>
-                      </p:stCondLst>
-                      <p:childTnLst>
-                        <p:par>
-                          <p:cTn id="4" fill="hold">
-                            <p:stCondLst>
-                              <p:cond delay="0"/>
-                            </p:stCondLst>
-                            <p:childTnLst>
-                              <p:par>
-                                <p:cTn id="5" presetID="1" presetClass="entr" presetSubtype="0" fill="hold" nodeType="clickEffect">
-                                  <p:stCondLst>
-                                    <p:cond delay="0"/>
-                                  </p:stCondLst>
-                                  <p:childTnLst>
-                                    <p:set>
-                                      <p:cBhvr>
-                                        <p:cTn id="6" dur="1" fill="hold">
-                                          <p:stCondLst>
-                                            <p:cond delay="0"/>
-                                          </p:stCondLst>
-                                        </p:cTn>
-                                        <p:tgtEl>
-                                          <p:spTgt spid="4"/>
-                                        </p:tgtEl>
-                                        <p:attrNameLst>
-                                          <p:attrName>style.visibility</p:attrName>
-                                        </p:attrNameLst>
-                                      </p:cBhvr>
-                                      <p:to>
-                                        <p:strVal val="visible"/>
-                                      </p:to>
-                                    </p:set>
-                                  </p:childTnLst>
-                                </p:cTn>
-                              </p:par>
-                            </p:childTnLst>
-                          </p:cTn>
-                        </p:par>
-                      </p:childTnLst>
-                    </p:cTn>
-                  </p:par>
-                </p:childTnLst>
-              </p:cTn>
-              <p:prevCondLst>
-                <p:cond evt="onPrev" delay="0">
-                  <p:tgtEl>
-                    <p:sldTgt/>
-                  </p:tgtEl>
-                </p:cond>
-              </p:prevCondLst>
-              <p:nextCondLst>
-                <p:cond evt="onNext" delay="0">
-                  <p:tgtEl>
-                    <p:sldTgt/>
-                  </p:tgtEl>
-                </p:cond>
-              </p:nextCondLst>
-            </p:seq>
-          </p:childTnLst>
-        </p:cTn>
-      </p:par>
-    </p:tnLst>
-  </p:timing>
-</p:sld>
-</file>
-
 <file path=ppt/slides/slide3.xml><?xml version="1.0" encoding="utf-8"?>
 <p:sld xmlns:a="http://schemas.openxmlformats.org/drawingml/2006/main" xmlns:r="http://schemas.openxmlformats.org/officeDocument/2006/relationships" xmlns:p="http://schemas.openxmlformats.org/presentationml/2006/main">
   <p:cSld>
@@ -19327,6 +19734,199 @@
           <p:cNvPr id="2" name="Title 1">
             <a:extLst>
               <a:ext uri="{FF2B5EF4-FFF2-40B4-BE49-F238E27FC236}">
+                <a16:creationId xmlns:a16="http://schemas.microsoft.com/office/drawing/2014/main" id="{4D6D1453-E58B-45BD-BAA4-656BAE6322B8}"/>
+              </a:ext>
+            </a:extLst>
+          </p:cNvPr>
+          <p:cNvSpPr>
+            <a:spLocks noGrp="1"/>
+          </p:cNvSpPr>
+          <p:nvPr>
+            <p:ph type="title"/>
+          </p:nvPr>
+        </p:nvSpPr>
+        <p:spPr/>
+        <p:txBody>
+          <a:bodyPr/>
+          <a:lstStyle/>
+          <a:p>
+            <a:r>
+              <a:rPr lang="en-US" dirty="0"/>
+              <a:t>Example</a:t>
+            </a:r>
+          </a:p>
+        </p:txBody>
+      </p:sp>
+      <p:sp>
+        <p:nvSpPr>
+          <p:cNvPr id="3" name="Content Placeholder 2">
+            <a:extLst>
+              <a:ext uri="{FF2B5EF4-FFF2-40B4-BE49-F238E27FC236}">
+                <a16:creationId xmlns:a16="http://schemas.microsoft.com/office/drawing/2014/main" id="{32A02CE3-4B96-4158-9FA7-2876DB5B7749}"/>
+              </a:ext>
+            </a:extLst>
+          </p:cNvPr>
+          <p:cNvSpPr>
+            <a:spLocks noGrp="1"/>
+          </p:cNvSpPr>
+          <p:nvPr>
+            <p:ph sz="quarter" idx="1"/>
+          </p:nvPr>
+        </p:nvSpPr>
+        <p:spPr>
+          <a:xfrm>
+            <a:off x="1981200" y="3048000"/>
+            <a:ext cx="8229600" cy="3108960"/>
+          </a:xfrm>
+        </p:spPr>
+        <p:txBody>
+          <a:bodyPr/>
+          <a:lstStyle/>
+          <a:p>
+            <a:endParaRPr lang="en-US" dirty="0"/>
+          </a:p>
+        </p:txBody>
+      </p:sp>
+      <p:pic>
+        <p:nvPicPr>
+          <p:cNvPr id="4" name="Picture 3">
+            <a:extLst>
+              <a:ext uri="{FF2B5EF4-FFF2-40B4-BE49-F238E27FC236}">
+                <a16:creationId xmlns:a16="http://schemas.microsoft.com/office/drawing/2014/main" id="{57E3D3F3-6A1C-4DBF-BFE6-254AC491E3B7}"/>
+              </a:ext>
+            </a:extLst>
+          </p:cNvPr>
+          <p:cNvPicPr>
+            <a:picLocks noChangeAspect="1"/>
+          </p:cNvPicPr>
+          <p:nvPr/>
+        </p:nvPicPr>
+        <p:blipFill>
+          <a:blip r:embed="rId2"/>
+          <a:stretch>
+            <a:fillRect/>
+          </a:stretch>
+        </p:blipFill>
+        <p:spPr>
+          <a:xfrm>
+            <a:off x="3048001" y="1371600"/>
+            <a:ext cx="5569607" cy="1316244"/>
+          </a:xfrm>
+          <a:prstGeom prst="rect">
+            <a:avLst/>
+          </a:prstGeom>
+        </p:spPr>
+      </p:pic>
+    </p:spTree>
+    <p:extLst>
+      <p:ext uri="{BB962C8B-B14F-4D97-AF65-F5344CB8AC3E}">
+        <p14:creationId xmlns:p14="http://schemas.microsoft.com/office/powerpoint/2010/main" val="2247355705"/>
+      </p:ext>
+    </p:extLst>
+  </p:cSld>
+  <p:clrMapOvr>
+    <a:masterClrMapping/>
+  </p:clrMapOvr>
+  <p:timing>
+    <p:tnLst>
+      <p:par>
+        <p:cTn id="1" dur="indefinite" restart="never" nodeType="tmRoot">
+          <p:childTnLst>
+            <p:seq concurrent="1" nextAc="seek">
+              <p:cTn id="2" dur="indefinite" nodeType="mainSeq">
+                <p:childTnLst>
+                  <p:par>
+                    <p:cTn id="3" fill="hold">
+                      <p:stCondLst>
+                        <p:cond delay="indefinite"/>
+                      </p:stCondLst>
+                      <p:childTnLst>
+                        <p:par>
+                          <p:cTn id="4" fill="hold">
+                            <p:stCondLst>
+                              <p:cond delay="0"/>
+                            </p:stCondLst>
+                            <p:childTnLst>
+                              <p:par>
+                                <p:cTn id="5" presetID="1" presetClass="entr" presetSubtype="0" fill="hold" nodeType="clickEffect">
+                                  <p:stCondLst>
+                                    <p:cond delay="0"/>
+                                  </p:stCondLst>
+                                  <p:childTnLst>
+                                    <p:set>
+                                      <p:cBhvr>
+                                        <p:cTn id="6" dur="1" fill="hold">
+                                          <p:stCondLst>
+                                            <p:cond delay="0"/>
+                                          </p:stCondLst>
+                                        </p:cTn>
+                                        <p:tgtEl>
+                                          <p:spTgt spid="4"/>
+                                        </p:tgtEl>
+                                        <p:attrNameLst>
+                                          <p:attrName>style.visibility</p:attrName>
+                                        </p:attrNameLst>
+                                      </p:cBhvr>
+                                      <p:to>
+                                        <p:strVal val="visible"/>
+                                      </p:to>
+                                    </p:set>
+                                  </p:childTnLst>
+                                </p:cTn>
+                              </p:par>
+                            </p:childTnLst>
+                          </p:cTn>
+                        </p:par>
+                      </p:childTnLst>
+                    </p:cTn>
+                  </p:par>
+                </p:childTnLst>
+              </p:cTn>
+              <p:prevCondLst>
+                <p:cond evt="onPrev" delay="0">
+                  <p:tgtEl>
+                    <p:sldTgt/>
+                  </p:tgtEl>
+                </p:cond>
+              </p:prevCondLst>
+              <p:nextCondLst>
+                <p:cond evt="onNext" delay="0">
+                  <p:tgtEl>
+                    <p:sldTgt/>
+                  </p:tgtEl>
+                </p:cond>
+              </p:nextCondLst>
+            </p:seq>
+          </p:childTnLst>
+        </p:cTn>
+      </p:par>
+    </p:tnLst>
+  </p:timing>
+</p:sld>
+</file>
+
+<file path=ppt/slides/slide31.xml><?xml version="1.0" encoding="utf-8"?>
+<p:sld xmlns:a="http://schemas.openxmlformats.org/drawingml/2006/main" xmlns:r="http://schemas.openxmlformats.org/officeDocument/2006/relationships" xmlns:p="http://schemas.openxmlformats.org/presentationml/2006/main">
+  <p:cSld>
+    <p:spTree>
+      <p:nvGrpSpPr>
+        <p:cNvPr id="1" name=""/>
+        <p:cNvGrpSpPr/>
+        <p:nvPr/>
+      </p:nvGrpSpPr>
+      <p:grpSpPr>
+        <a:xfrm>
+          <a:off x="0" y="0"/>
+          <a:ext cx="0" cy="0"/>
+          <a:chOff x="0" y="0"/>
+          <a:chExt cx="0" cy="0"/>
+        </a:xfrm>
+      </p:grpSpPr>
+      <p:sp>
+        <p:nvSpPr>
+          <p:cNvPr id="2" name="Title 1">
+            <a:extLst>
+              <a:ext uri="{FF2B5EF4-FFF2-40B4-BE49-F238E27FC236}">
                 <a16:creationId xmlns:a16="http://schemas.microsoft.com/office/drawing/2014/main" id="{1871779F-2602-44B4-B239-83E3D144EBC2}"/>
               </a:ext>
             </a:extLst>
@@ -19391,7 +19991,7 @@
 </p:sld>
 </file>
 
-<file path=ppt/slides/slide31.xml><?xml version="1.0" encoding="utf-8"?>
+<file path=ppt/slides/slide32.xml><?xml version="1.0" encoding="utf-8"?>
 <p:sld xmlns:a="http://schemas.openxmlformats.org/drawingml/2006/main" xmlns:r="http://schemas.openxmlformats.org/officeDocument/2006/relationships" xmlns:p="http://schemas.openxmlformats.org/presentationml/2006/main">
   <p:cSld>
     <p:spTree>
@@ -19523,7 +20123,7 @@
 </p:sld>
 </file>
 
-<file path=ppt/slides/slide32.xml><?xml version="1.0" encoding="utf-8"?>
+<file path=ppt/slides/slide33.xml><?xml version="1.0" encoding="utf-8"?>
 <p:sld xmlns:a="http://schemas.openxmlformats.org/drawingml/2006/main" xmlns:r="http://schemas.openxmlformats.org/officeDocument/2006/relationships" xmlns:p="http://schemas.openxmlformats.org/presentationml/2006/main">
   <p:cSld>
     <p:spTree>
